--- a/08-data-retrieval/17-SQL.pptx
+++ b/08-data-retrieval/17-SQL.pptx
@@ -916,7 +916,7 @@
                 <a:tab algn="l" pos="0"/>
               </a:tabLst>
             </a:pPr>
-            <a:fld id="{35A4AC6F-9F18-4C8F-ABD4-9E0182651ABB}" type="slidenum">
+            <a:fld id="{6DEBA0EB-B9FC-408A-BEA6-85914B8618ED}" type="slidenum">
               <a:rPr b="0" lang="en" sz="1000" strike="noStrike" u="none">
                 <a:solidFill>
                   <a:schemeClr val="dk2"/>
@@ -1025,7 +1025,7 @@
                 <a:tab algn="l" pos="0"/>
               </a:tabLst>
             </a:pPr>
-            <a:fld id="{7AFE3477-B277-46C3-84AC-952A478DB79E}" type="slidenum">
+            <a:fld id="{72CC2A75-74D7-4CF3-9565-056D428B6DE2}" type="slidenum">
               <a:rPr b="0" lang="en" sz="1000" strike="noStrike" u="none">
                 <a:solidFill>
                   <a:schemeClr val="dk2"/>
@@ -1946,7 +1946,7 @@
                 <a:tab algn="l" pos="0"/>
               </a:tabLst>
             </a:pPr>
-            <a:fld id="{F2017D57-1ED4-4440-89D1-B8996F0C9F83}" type="slidenum">
+            <a:fld id="{0E44FD2A-1896-490D-9E08-EEE08E4DED1A}" type="slidenum">
               <a:rPr b="0" lang="en" sz="1000" strike="noStrike" u="none">
                 <a:solidFill>
                   <a:schemeClr val="dk2"/>
@@ -2867,7 +2867,7 @@
                 <a:tab algn="l" pos="0"/>
               </a:tabLst>
             </a:pPr>
-            <a:fld id="{14FA384E-B632-4F5F-BBB5-6031FBB2333B}" type="slidenum">
+            <a:fld id="{0795FE6C-A17D-4DA5-9E67-1FF0C08FFC2F}" type="slidenum">
               <a:rPr b="0" lang="en" sz="1000" strike="noStrike" u="none">
                 <a:solidFill>
                   <a:schemeClr val="dk2"/>
@@ -3788,7 +3788,7 @@
                 <a:tab algn="l" pos="0"/>
               </a:tabLst>
             </a:pPr>
-            <a:fld id="{18A1F5F0-E17E-40BA-8DF1-233A34C99643}" type="slidenum">
+            <a:fld id="{C04D25C5-1B30-427B-9EEF-C8600BD4380E}" type="slidenum">
               <a:rPr b="0" lang="en" sz="1000" strike="noStrike" u="none">
                 <a:solidFill>
                   <a:schemeClr val="dk2"/>
@@ -4456,7 +4456,7 @@
                 <a:tab algn="l" pos="0"/>
               </a:tabLst>
             </a:pPr>
-            <a:fld id="{4C5CD16C-2B50-42F6-915F-BD3CA5C2C5BB}" type="slidenum">
+            <a:fld id="{E7EA544C-B24B-4EA5-B609-9D5685084B77}" type="slidenum">
               <a:rPr b="0" lang="en" sz="1000" strike="noStrike" u="none">
                 <a:solidFill>
                   <a:schemeClr val="dk2"/>
@@ -5630,7 +5630,7 @@
                 <a:tab algn="l" pos="0"/>
               </a:tabLst>
             </a:pPr>
-            <a:fld id="{A592A643-3D42-465B-A473-B374B8D75F4A}" type="slidenum">
+            <a:fld id="{ABA0FF86-70DA-44A9-82ED-9A73D60B1F49}" type="slidenum">
               <a:rPr b="0" lang="en" sz="1000" strike="noStrike" u="none">
                 <a:solidFill>
                   <a:schemeClr val="dk2"/>
@@ -7310,7 +7310,7 @@
                 <a:tab algn="l" pos="0"/>
               </a:tabLst>
             </a:pPr>
-            <a:fld id="{45AFDDA4-89D8-44E2-BB04-B9639C433473}" type="slidenum">
+            <a:fld id="{7BD32387-8D22-4BD9-B5BF-3CBB55F630CC}" type="slidenum">
               <a:rPr b="0" lang="en" sz="1000" strike="noStrike" u="none">
                 <a:solidFill>
                   <a:schemeClr val="dk2"/>
@@ -7419,7 +7419,7 @@
                 <a:tab algn="l" pos="0"/>
               </a:tabLst>
             </a:pPr>
-            <a:fld id="{3B0417C4-8AA9-459F-B751-B9F79A4E41E1}" type="slidenum">
+            <a:fld id="{5EAB986C-7086-4605-9341-2419F0D7A107}" type="slidenum">
               <a:rPr b="0" lang="en" sz="1000" strike="noStrike" u="none">
                 <a:solidFill>
                   <a:schemeClr val="dk2"/>
@@ -7887,7 +7887,7 @@
                 <a:tab algn="l" pos="0"/>
               </a:tabLst>
             </a:pPr>
-            <a:fld id="{5C40BF3F-8342-4E66-B580-BD9186420BD6}" type="slidenum">
+            <a:fld id="{AEAE3D00-A0E7-40DA-899D-FC501C97179C}" type="slidenum">
               <a:rPr b="0" lang="en" sz="1000" strike="noStrike" u="none">
                 <a:solidFill>
                   <a:schemeClr val="dk2"/>
@@ -8302,7 +8302,7 @@
                 <a:tab algn="l" pos="0"/>
               </a:tabLst>
             </a:pPr>
-            <a:fld id="{34888523-B412-48E9-BD66-F943F07F1AC1}" type="slidenum">
+            <a:fld id="{2F4D671B-675A-429E-83C1-50573A1CD92F}" type="slidenum">
               <a:rPr b="0" lang="en" sz="1000" strike="noStrike" u="none">
                 <a:solidFill>
                   <a:schemeClr val="dk2"/>
@@ -8970,7 +8970,7 @@
                 <a:tab algn="l" pos="0"/>
               </a:tabLst>
             </a:pPr>
-            <a:fld id="{A2353E88-479A-4AD2-A607-6C15EE64E5E8}" type="slidenum">
+            <a:fld id="{8BDBA044-C8BE-45FB-B4D2-095A52A995FD}" type="slidenum">
               <a:rPr b="0" lang="en" sz="1000" strike="noStrike" u="none">
                 <a:solidFill>
                   <a:schemeClr val="dk2"/>
@@ -9638,7 +9638,7 @@
                 <a:tab algn="l" pos="0"/>
               </a:tabLst>
             </a:pPr>
-            <a:fld id="{B0736143-E499-47C2-A727-2B505D844E7F}" type="slidenum">
+            <a:fld id="{519B632E-24D6-4906-A8F9-42CB1880882E}" type="slidenum">
               <a:rPr b="0" lang="en" sz="1000" strike="noStrike" u="none">
                 <a:solidFill>
                   <a:schemeClr val="dk2"/>
@@ -9800,7 +9800,7 @@
                 <a:tab algn="l" pos="0"/>
               </a:tabLst>
             </a:pPr>
-            <a:fld id="{801F10F7-10F2-4CA6-949B-0500252D8B95}" type="slidenum">
+            <a:fld id="{0D035CB3-2CF0-428F-A548-69B392F05219}" type="slidenum">
               <a:rPr b="0" lang="en" sz="1000" strike="noStrike" u="none">
                 <a:solidFill>
                   <a:schemeClr val="dk2"/>
@@ -9909,7 +9909,7 @@
                 <a:tab algn="l" pos="0"/>
               </a:tabLst>
             </a:pPr>
-            <a:fld id="{978B5C5A-F423-4643-B3E5-8799A4EAF909}" type="slidenum">
+            <a:fld id="{53F2DBB0-8983-4749-AD25-294CF6C93FFA}" type="slidenum">
               <a:rPr b="0" lang="en" sz="1000" strike="noStrike" u="none">
                 <a:solidFill>
                   <a:schemeClr val="dk2"/>
@@ -10830,7 +10830,7 @@
                 <a:tab algn="l" pos="0"/>
               </a:tabLst>
             </a:pPr>
-            <a:fld id="{BB10880F-3422-4B30-BFDF-AA128B7911BD}" type="slidenum">
+            <a:fld id="{5E1F5DFA-7D28-4D7F-AC00-88E87550E3EB}" type="slidenum">
               <a:rPr b="0" lang="en" sz="1000" strike="noStrike" u="none">
                 <a:solidFill>
                   <a:schemeClr val="dk2"/>
@@ -11751,7 +11751,7 @@
                 <a:tab algn="l" pos="0"/>
               </a:tabLst>
             </a:pPr>
-            <a:fld id="{E73246C7-F03F-495D-8053-B1B962A06B86}" type="slidenum">
+            <a:fld id="{30DE1CCD-2C34-4D08-8595-6DEB1DC916A9}" type="slidenum">
               <a:rPr b="0" lang="en" sz="1000" strike="noStrike" u="none">
                 <a:solidFill>
                   <a:schemeClr val="dk2"/>
@@ -11810,7 +11810,7 @@
         <p:txBody>
           <a:bodyPr/>
           <a:p>
-            <a:fld id="{90D30CFE-31FE-4BB6-B113-0F536484EE30}" type="slidenum">
+            <a:fld id="{78957AF8-A36D-4962-9988-FFEC64E880B0}" type="slidenum">
               <a:t>&lt;#&gt;</a:t>
             </a:fld>
           </a:p>
@@ -11852,7 +11852,7 @@
         <p:txBody>
           <a:bodyPr/>
           <a:p>
-            <a:fld id="{D9C01AD4-F3C2-4BD4-804F-CF699C74FA13}" type="slidenum">
+            <a:fld id="{42560F5A-0A0A-44C4-9EAD-40A816B7BB17}" type="slidenum">
               <a:t>&lt;#&gt;</a:t>
             </a:fld>
           </a:p>
@@ -13009,7 +13009,7 @@
                 <a:tab algn="l" pos="0"/>
               </a:tabLst>
             </a:pPr>
-            <a:fld id="{6B83B901-0CF9-43B4-B57E-63D135BB421C}" type="slidenum">
+            <a:fld id="{2FEAB551-3919-4D20-819D-00DA00BFF5F1}" type="slidenum">
               <a:rPr b="0" lang="en" sz="1000" strike="noStrike" u="none">
                 <a:solidFill>
                   <a:schemeClr val="dk2"/>
@@ -14689,7 +14689,7 @@
                 <a:tab algn="l" pos="0"/>
               </a:tabLst>
             </a:pPr>
-            <a:fld id="{0461311C-FE19-4D31-87F5-51E48896A56C}" type="slidenum">
+            <a:fld id="{81278F33-78B4-4A4A-B30B-CDF334EAAA9E}" type="slidenum">
               <a:rPr b="0" lang="en" sz="1000" strike="noStrike" u="none">
                 <a:solidFill>
                   <a:schemeClr val="dk2"/>
@@ -14798,7 +14798,7 @@
                 <a:tab algn="l" pos="0"/>
               </a:tabLst>
             </a:pPr>
-            <a:fld id="{39C01315-FC8E-40AC-B5CC-1879FE60EC0A}" type="slidenum">
+            <a:fld id="{CA58C46A-C872-443D-A068-5CB08206260A}" type="slidenum">
               <a:rPr b="0" lang="en" sz="1000" strike="noStrike" u="none">
                 <a:solidFill>
                   <a:schemeClr val="dk2"/>
@@ -14960,7 +14960,7 @@
                 <a:tab algn="l" pos="0"/>
               </a:tabLst>
             </a:pPr>
-            <a:fld id="{AD2B4C18-C32B-42B1-AC43-5D20AD8BCCC8}" type="slidenum">
+            <a:fld id="{E79EF56F-5648-41F2-B691-C2B518630C86}" type="slidenum">
               <a:rPr b="0" lang="en" sz="1000" strike="noStrike" u="none">
                 <a:solidFill>
                   <a:schemeClr val="dk2"/>
@@ -15375,7 +15375,7 @@
                 <a:tab algn="l" pos="0"/>
               </a:tabLst>
             </a:pPr>
-            <a:fld id="{7144E81A-6936-44A6-B84F-46F7EDCFA2AC}" type="slidenum">
+            <a:fld id="{58CD04C2-9DED-4597-9732-A60178ABA0A0}" type="slidenum">
               <a:rPr b="0" lang="en" sz="1000" strike="noStrike" u="none">
                 <a:solidFill>
                   <a:schemeClr val="dk2"/>
@@ -16043,7 +16043,7 @@
                 <a:tab algn="l" pos="0"/>
               </a:tabLst>
             </a:pPr>
-            <a:fld id="{76C7C5A1-06CE-423F-A28F-DF2BFA421350}" type="slidenum">
+            <a:fld id="{FBB22964-7FA7-4A29-B35B-8D0E856AB4AD}" type="slidenum">
               <a:rPr b="0" lang="en" sz="1000" strike="noStrike" u="none">
                 <a:solidFill>
                   <a:schemeClr val="dk2"/>
@@ -16205,7 +16205,7 @@
                 <a:tab algn="l" pos="0"/>
               </a:tabLst>
             </a:pPr>
-            <a:fld id="{05B879F1-94EB-4C56-840B-0A5D587AF504}" type="slidenum">
+            <a:fld id="{2CB667E9-A036-4F96-B34F-C10A07DEF3E0}" type="slidenum">
               <a:rPr b="0" lang="en" sz="1000" strike="noStrike" u="none">
                 <a:solidFill>
                   <a:schemeClr val="dk2"/>
@@ -16388,7 +16388,7 @@
                 <a:tab algn="l" pos="0"/>
               </a:tabLst>
             </a:pPr>
-            <a:fld id="{59AA952C-F11A-4DD8-A34D-8DBEA209142C}" type="slidenum">
+            <a:fld id="{0A35507F-ABCE-4125-A0D2-5DC0F4078411}" type="slidenum">
               <a:rPr b="0" lang="en" sz="1000" strike="noStrike" u="none">
                 <a:solidFill>
                   <a:schemeClr val="dk2"/>
@@ -16807,7 +16807,7 @@
                 <a:tab algn="l" pos="0"/>
               </a:tabLst>
             </a:pPr>
-            <a:fld id="{066D9E66-67A2-4A65-8C27-01AE5A63D1FA}" type="slidenum">
+            <a:fld id="{10C625FF-420C-48A5-ABFC-6F860204BA9C}" type="slidenum">
               <a:rPr b="0" lang="en" sz="1000" strike="noStrike" u="none">
                 <a:solidFill>
                   <a:schemeClr val="dk2"/>
@@ -17350,7 +17350,7 @@
                 <a:tab algn="l" pos="0"/>
               </a:tabLst>
             </a:pPr>
-            <a:fld id="{0550D253-4E56-4E97-80DD-4270BA11B273}" type="datetime5">
+            <a:fld id="{AF79F0E9-5981-49F3-ABAD-9B8B6AB7A27B}" type="datetime5">
               <a:rPr b="0" lang="en" sz="1200" strike="noStrike" u="none">
                 <a:solidFill>
                   <a:srgbClr val="2a2a2a"/>
